--- a/week08/Issue_Merge.pptx
+++ b/week08/Issue_Merge.pptx
@@ -104,6 +104,11 @@
       </a:defRPr>
     </a:lvl9pPr>
   </p:defaultTextStyle>
+  <p:extLst>
+    <p:ext uri="{EFAFB233-063F-42B5-8137-9DF3F51BA10A}">
+      <p15:sldGuideLst xmlns:p15="http://schemas.microsoft.com/office/powerpoint/2012/main"/>
+    </p:ext>
+  </p:extLst>
 </p:presentation>
 </file>
 
@@ -3350,19 +3355,19 @@
           <a:lstStyle/>
           <a:p>
             <a:r>
-              <a:rPr lang="en-US" altLang="ko-KR"/>
+              <a:rPr lang="en-US" altLang="ko-KR" b="1"/>
               <a:t>Issue</a:t>
             </a:r>
             <a:r>
-              <a:rPr lang="ko-KR" altLang="en-US"/>
+              <a:rPr lang="ko-KR" altLang="en-US" b="1"/>
               <a:t>에서 부터 </a:t>
             </a:r>
             <a:r>
-              <a:rPr lang="en-US" altLang="ko-KR"/>
+              <a:rPr lang="en-US" altLang="ko-KR" b="1"/>
               <a:t>Merge </a:t>
             </a:r>
             <a:r>
-              <a:rPr lang="ko-KR" altLang="en-US"/>
+              <a:rPr lang="ko-KR" altLang="en-US" b="1"/>
               <a:t>까지</a:t>
             </a:r>
           </a:p>
@@ -3397,34 +3402,34 @@
           <a:lstStyle/>
           <a:p>
             <a:r>
-              <a:rPr lang="en-US" altLang="ko-KR"/>
+              <a:rPr lang="en-US" altLang="ko-KR" u="sng"/>
               <a:t>Issue -&gt; Branch -&gt; </a:t>
             </a:r>
             <a:r>
-              <a:rPr lang="ko-KR" altLang="en-US"/>
+              <a:rPr lang="ko-KR" altLang="en-US" u="sng"/>
               <a:t>작업</a:t>
             </a:r>
             <a:r>
-              <a:rPr lang="en-US" altLang="ko-KR"/>
+              <a:rPr lang="en-US" altLang="ko-KR" u="sng"/>
               <a:t>,Commit, Push -&gt; PR -&gt; </a:t>
             </a:r>
             <a:r>
-              <a:rPr lang="ko-KR" altLang="en-US"/>
+              <a:rPr lang="ko-KR" altLang="en-US" u="sng"/>
               <a:t>검토</a:t>
             </a:r>
             <a:r>
-              <a:rPr lang="en-US" altLang="ko-KR"/>
+              <a:rPr lang="en-US" altLang="ko-KR" u="sng"/>
               <a:t>, </a:t>
             </a:r>
             <a:r>
-              <a:rPr lang="ko-KR" altLang="en-US"/>
+              <a:rPr lang="ko-KR" altLang="en-US" u="sng"/>
               <a:t>충돌 해결 </a:t>
             </a:r>
             <a:r>
-              <a:rPr lang="en-US" altLang="ko-KR"/>
+              <a:rPr lang="en-US" altLang="ko-KR" u="sng"/>
               <a:t>-&gt; Merge</a:t>
             </a:r>
-            <a:endParaRPr lang="ko-KR" altLang="en-US"/>
+            <a:endParaRPr lang="ko-KR" altLang="en-US" u="sng"/>
           </a:p>
         </p:txBody>
       </p:sp>
@@ -3460,14 +3465,14 @@
               <a:buAutoNum type="arabicPeriod"/>
             </a:pPr>
             <a:r>
-              <a:rPr lang="en-US" altLang="ko-KR"/>
+              <a:rPr lang="en-US" altLang="ko-KR" b="1"/>
               <a:t>Issue</a:t>
             </a:r>
             <a:r>
-              <a:rPr lang="ko-KR" altLang="en-US"/>
+              <a:rPr lang="ko-KR" altLang="en-US" b="1"/>
               <a:t> 발행</a:t>
             </a:r>
-            <a:endParaRPr lang="en-US" altLang="ko-KR"/>
+            <a:endParaRPr lang="en-US" altLang="ko-KR" b="1"/>
           </a:p>
           <a:p>
             <a:r>
@@ -3509,14 +3514,14 @@
           </a:p>
           <a:p>
             <a:r>
-              <a:rPr lang="en-US" altLang="ko-KR"/>
+              <a:rPr lang="en-US" altLang="ko-KR" b="1"/>
               <a:t>2. Branch </a:t>
             </a:r>
             <a:r>
-              <a:rPr lang="ko-KR" altLang="en-US"/>
+              <a:rPr lang="ko-KR" altLang="en-US" b="1"/>
               <a:t>생성</a:t>
             </a:r>
-            <a:endParaRPr lang="en-US" altLang="ko-KR"/>
+            <a:endParaRPr lang="en-US" altLang="ko-KR" b="1"/>
           </a:p>
           <a:p>
             <a:r>
@@ -3545,15 +3550,15 @@
           </a:p>
           <a:p>
             <a:r>
-              <a:rPr lang="en-US" altLang="ko-KR"/>
+              <a:rPr lang="en-US" altLang="ko-KR" b="1"/>
               <a:t>3. </a:t>
             </a:r>
             <a:r>
-              <a:rPr lang="ko-KR" altLang="en-US"/>
+              <a:rPr lang="ko-KR" altLang="en-US" b="1"/>
               <a:t>작업</a:t>
             </a:r>
             <a:r>
-              <a:rPr lang="en-US" altLang="ko-KR"/>
+              <a:rPr lang="en-US" altLang="ko-KR" b="1"/>
               <a:t>, Commit, Push</a:t>
             </a:r>
           </a:p>
@@ -3584,7 +3589,7 @@
           </a:p>
           <a:p>
             <a:r>
-              <a:rPr lang="en-US" altLang="ko-KR"/>
+              <a:rPr lang="en-US" altLang="ko-KR" b="1"/>
               <a:t>4. Pull Request</a:t>
             </a:r>
           </a:p>
@@ -3655,14 +3660,14 @@
           </a:p>
           <a:p>
             <a:r>
-              <a:rPr lang="en-US" altLang="ko-KR"/>
+              <a:rPr lang="en-US" altLang="ko-KR" b="1"/>
               <a:t>5. </a:t>
             </a:r>
             <a:r>
-              <a:rPr lang="ko-KR" altLang="en-US"/>
+              <a:rPr lang="ko-KR" altLang="en-US" b="1"/>
               <a:t>검토와 충돌 해결</a:t>
             </a:r>
-            <a:endParaRPr lang="en-US" altLang="ko-KR"/>
+            <a:endParaRPr lang="en-US" altLang="ko-KR" b="1"/>
           </a:p>
           <a:p>
             <a:r>
@@ -3699,22 +3704,22 @@
           </a:p>
           <a:p>
             <a:r>
-              <a:rPr lang="en-US" altLang="ko-KR"/>
+              <a:rPr lang="en-US" altLang="ko-KR" b="1"/>
               <a:t>6. Merge </a:t>
             </a:r>
             <a:r>
-              <a:rPr lang="ko-KR" altLang="en-US"/>
+              <a:rPr lang="ko-KR" altLang="en-US" b="1"/>
               <a:t>및 </a:t>
             </a:r>
             <a:r>
-              <a:rPr lang="en-US" altLang="ko-KR"/>
+              <a:rPr lang="en-US" altLang="ko-KR" b="1"/>
               <a:t>Issue </a:t>
             </a:r>
             <a:r>
-              <a:rPr lang="ko-KR" altLang="en-US"/>
+              <a:rPr lang="ko-KR" altLang="en-US" b="1"/>
               <a:t>종료</a:t>
             </a:r>
-            <a:endParaRPr lang="en-US" altLang="ko-KR"/>
+            <a:endParaRPr lang="en-US" altLang="ko-KR" b="1"/>
           </a:p>
           <a:p>
             <a:r>

--- a/week08/Issue_Merge.pptx
+++ b/week08/Issue_Merge.pptx
@@ -3769,6 +3769,51 @@
           </a:p>
           <a:p>
             <a:endParaRPr lang="en-US" altLang="ko-KR"/>
+          </a:p>
+        </p:txBody>
+      </p:sp>
+      <p:sp>
+        <p:nvSpPr>
+          <p:cNvPr id="2" name="TextBox 1">
+            <a:hlinkClick r:id="rId2"/>
+            <a:extLst>
+              <a:ext uri="{FF2B5EF4-FFF2-40B4-BE49-F238E27FC236}">
+                <a16:creationId xmlns:a16="http://schemas.microsoft.com/office/drawing/2014/main" id="{A327785B-2C53-5751-E613-C8C6E4BB7285}"/>
+              </a:ext>
+            </a:extLst>
+          </p:cNvPr>
+          <p:cNvSpPr txBox="1"/>
+          <p:nvPr/>
+        </p:nvSpPr>
+        <p:spPr>
+          <a:xfrm>
+            <a:off x="7564582" y="30777"/>
+            <a:ext cx="5902037" cy="307777"/>
+          </a:xfrm>
+          <a:prstGeom prst="rect">
+            <a:avLst/>
+          </a:prstGeom>
+          <a:noFill/>
+        </p:spPr>
+        <p:txBody>
+          <a:bodyPr wrap="square" rtlCol="0">
+            <a:spAutoFit/>
+          </a:bodyPr>
+          <a:lstStyle/>
+          <a:p>
+            <a:r>
+              <a:rPr lang="en-US" altLang="ko-KR" sz="1400" u="sng">
+                <a:solidFill>
+                  <a:srgbClr val="0070C0"/>
+                </a:solidFill>
+              </a:rPr>
+              <a:t>https://github.com/DHeon/devops/tree/main/week08</a:t>
+            </a:r>
+            <a:endParaRPr lang="ko-KR" altLang="en-US" sz="1400" u="sng">
+              <a:solidFill>
+                <a:srgbClr val="0070C0"/>
+              </a:solidFill>
+            </a:endParaRPr>
           </a:p>
         </p:txBody>
       </p:sp>
